--- a/MoveInSync_FDE_Case_Study.pptx
+++ b/MoveInSync_FDE_Case_Study.pptx
@@ -3516,7 +3516,7 @@
                 </a:solidFill>
                 <a:latin typeface="Aptos"/>
               </a:rPr>
-              <a:t>Evidence base: supplied 1★–5★ review snapshots + assignment brief</a:t>
+              <a:t>Evidence base: public Play Store listings and visible reviews (Oct 2026) + assignment brief</a:t>
             </a:r>
           </a:p>
         </p:txBody>
@@ -4169,7 +4169,7 @@
                 </a:solidFill>
                 <a:latin typeface="Aptos"/>
               </a:rPr>
-              <a:t>The public listing is already rated 4.6/5 (~1.15 lakh reviews in the supplied snapshot); the opportunity is to prevent avoidable bad commute experiences.</a:t>
+              <a:t>The public listing is already rated 4.6/5 (~1.15 lakh ratings, listing checked Oct 2026); the opportunity is to prevent avoidable bad commute experiences.</a:t>
             </a:r>
           </a:p>
         </p:txBody>
@@ -4782,7 +4782,7 @@
               </a:spcAft>
             </a:pPr>
             <a:r>
-              <a:rPr sz="1700" b="1" i="0">
+              <a:rPr sz="1500" b="1" i="0">
                 <a:solidFill>
                   <a:srgbClr val="FFFFFF"/>
                 </a:solidFill>
@@ -5157,7 +5157,7 @@
                 </a:solidFill>
                 <a:latin typeface="Aptos"/>
               </a:rPr>
-              <a:t>02 / READING THE 1★–5★ SAMPLES</a:t>
+              <a:t>02 / READING THE STAR BANDS</a:t>
             </a:r>
           </a:p>
         </p:txBody>
@@ -5196,7 +5196,7 @@
                 </a:solidFill>
                 <a:latin typeface="Aptos"/>
               </a:rPr>
-              <a:t>Different ratings tell one coherent story</a:t>
+              <a:t>How to read each star band</a:t>
             </a:r>
           </a:p>
         </p:txBody>
@@ -5235,7 +5235,7 @@
                 </a:solidFill>
                 <a:latin typeface="Aptos"/>
               </a:rPr>
-              <a:t>Use the star bands to understand severity and strengths—not to assume every review represents the whole user base.</a:t>
+              <a:t>A reading framework for severity and strengths. Not measured evidence, and not representative of the whole user base.</a:t>
             </a:r>
           </a:p>
         </p:txBody>
@@ -6524,7 +6524,7 @@
                 </a:solidFill>
                 <a:latin typeface="Aptos"/>
               </a:rPr>
-              <a:t>Method note: the pasted text preserves review text but not consistently the star label for each individual review; no star-band percentages are claimed.</a:t>
+              <a:t>Method note: star labels were not preserved on the review text I collected, so these bands are a reading framework, not measured results. No percentages are claimed.</a:t>
             </a:r>
           </a:p>
         </p:txBody>
@@ -6589,7 +6589,7 @@
                 </a:solidFill>
                 <a:latin typeface="Aptos"/>
               </a:rPr>
-              <a:t>03 / EVIDENCE FROM THE SUPPLIED REVIEWS</a:t>
+              <a:t>03 / EVIDENCE FROM THE PUBLIC REVIEWS</a:t>
             </a:r>
           </a:p>
         </p:txBody>
@@ -6667,7 +6667,7 @@
                 </a:solidFill>
                 <a:latin typeface="Aptos"/>
               </a:rPr>
-              <a:t>Examples below are paraphrases of visible reviews across the supplied snapshots; they are qualitative signals, not prevalence estimates.</a:t>
+              <a:t>Examples below are paraphrases of visible public reviews; they are qualitative signals, not prevalence estimates.</a:t>
             </a:r>
           </a:p>
         </p:txBody>
@@ -8917,7 +8917,7 @@
                 </a:solidFill>
                 <a:latin typeface="Aptos"/>
               </a:rPr>
-              <a:t>Persistent status: Booked / Pending / Failed; show trip details and safe retry.</a:t>
+              <a:t>Booked / Pending / Not booked status, trip details, safe retry. Owner: Product + Android.</a:t>
             </a:r>
           </a:p>
         </p:txBody>
@@ -9079,7 +9079,7 @@
                 </a:solidFill>
                 <a:latin typeface="Aptos"/>
               </a:rPr>
-              <a:t>Expose last GPS update; monitor stale pings and ETA error; avoid false precision.</a:t>
+              <a:t>Show last GPS update; track stale pings and ETA error. Owner: Engineering.</a:t>
             </a:r>
           </a:p>
         </p:txBody>
@@ -9241,7 +9241,7 @@
                 </a:solidFill>
                 <a:latin typeface="Aptos"/>
               </a:rPr>
-              <a:t>Pickup reminder, clear check-in state, grace/dispute path, protected cancellation.</a:t>
+              <a:t>Pickup reminder, check-in state, dispute path. Owner: Product + Ops.</a:t>
             </a:r>
           </a:p>
         </p:txBody>
@@ -14782,7 +14782,7 @@
                 </a:solidFill>
                 <a:latin typeface="Aptos"/>
               </a:rPr>
-              <a:t>Possible implementation: Python + a documented review source/export + GitHub Issues/Actions. Validate source availability and terms before automating collection.</a:t>
+              <a:t>Built: review_monitor.py (Python, google-play-scraper + pandas) is in the repo; weekly summary, trend, themes, worst app versions. Check source terms before scheduling.</a:t>
             </a:r>
           </a:p>
         </p:txBody>
@@ -15062,7 +15062,7 @@
               </a:defRPr>
             </a:pPr>
             <a:r>
-              <a:t>•  Synthesized the supplied public Google Play review snapshots across 1★–5★.</a:t>
+              <a:t>•  Reviewed the public Google Play listings and visible review text that I collected (Oct 2026).</a:t>
             </a:r>
           </a:p>
           <a:p>
@@ -15172,7 +15172,7 @@
               </a:defRPr>
             </a:pPr>
             <a:r>
-              <a:t>•  Copied text does not consistently preserve each review’s star label; no bucket percentages are claimed.</a:t>
+              <a:t>•  Star labels were not preserved on collected text; no bucket percentages are claimed.</a:t>
             </a:r>
           </a:p>
           <a:p>
@@ -15188,7 +15188,7 @@
               </a:defRPr>
             </a:pPr>
             <a:r>
-              <a:t>•  Internal telemetry and root-cause confirmation were not provided.</a:t>
+              <a:t>•  No internal telemetry. Scope is the employee app; driver apps (Driver Partner 3.5, Partner Lite 4.2) are a follow-up track.</a:t>
             </a:r>
           </a:p>
         </p:txBody>
